--- a/website/public/beispiele/quartal.pptx
+++ b/website/public/beispiele/quartal.pptx
@@ -163,7 +163,7 @@
               <a:lstStyle/>
               <a:p>
                 <a:pPr>
-                  <a:defRPr b="1" i="0" strike="noStrike" sz="1100" u="none">
+                  <a:defRPr b="1" i="0" strike="noStrike" sz="1400" u="none">
                     <a:solidFill>
                       <a:srgbClr val="16202B"/>
                     </a:solidFill>
@@ -246,7 +246,7 @@
               <a:lstStyle/>
               <a:p>
                 <a:pPr>
-                  <a:defRPr b="1" i="0" strike="noStrike" sz="1100" u="none">
+                  <a:defRPr b="1" i="0" strike="noStrike" sz="1400" u="none">
                     <a:solidFill>
                       <a:srgbClr val="16202B"/>
                     </a:solidFill>
@@ -308,7 +308,7 @@
             <a:lstStyle/>
             <a:p>
               <a:pPr>
-                <a:defRPr b="1" i="0" strike="noStrike" sz="1100" u="none">
+                <a:defRPr b="1" i="0" strike="noStrike" sz="1400" u="none">
                   <a:solidFill>
                     <a:srgbClr val="16202B"/>
                   </a:solidFill>
@@ -325,7 +325,7 @@
           <c:showBubbleSize val="0"/>
           <c:showLeaderLines val="0"/>
         </c:dLbls>
-        <c:gapWidth val="60"/>
+        <c:gapWidth val="40"/>
         <c:overlap val="0"/>
         <c:axId val="2094734554"/>
         <c:axId val="2094734552"/>
@@ -356,7 +356,7 @@
           <a:lstStyle/>
           <a:p>
             <a:pPr>
-              <a:defRPr sz="1100" b="0" i="0" u="none" strike="noStrike">
+              <a:defRPr sz="1400" b="0" i="0" u="none" strike="noStrike">
                 <a:solidFill>
                   <a:srgbClr val="5A6470"/>
                 </a:solidFill>
@@ -395,7 +395,7 @@
           <a:lstStyle/>
           <a:p>
             <a:pPr>
-              <a:defRPr sz="1100" b="0" i="0" u="none" strike="noStrike">
+              <a:defRPr sz="1400" b="0" i="0" u="none" strike="noStrike">
                 <a:solidFill>
                   <a:srgbClr val="5A6470"/>
                 </a:solidFill>
@@ -425,7 +425,7 @@
         <a:lstStyle/>
         <a:p>
           <a:pPr>
-            <a:defRPr sz="1100">
+            <a:defRPr sz="1400">
               <a:solidFill>
                 <a:srgbClr val="16202B"/>
               </a:solidFill>
@@ -2183,13 +2183,11 @@
         </p:nvSpPr>
         <p:spPr>
           <a:xfrm>
-            <a:off x="685800" y="1860872"/>
-            <a:ext cx="95250" cy="95250"/>
+            <a:off x="685800" y="1898972"/>
+            <a:ext cx="133350" cy="19050"/>
           </a:xfrm>
-          <a:prstGeom prst="roundRect">
-            <a:avLst>
-              <a:gd name="adj" fmla="val 30000"/>
-            </a:avLst>
+          <a:prstGeom prst="rect">
+            <a:avLst/>
           </a:prstGeom>
           <a:solidFill>
             <a:srgbClr val="0A7C66"/>
@@ -2205,8 +2203,8 @@
         </p:nvSpPr>
         <p:spPr>
           <a:xfrm>
-            <a:off x="990600" y="1711375"/>
-            <a:ext cx="9358503" cy="394320"/>
+            <a:off x="1028700" y="1711375"/>
+            <a:ext cx="9319832" cy="394320"/>
           </a:xfrm>
           <a:prstGeom prst="rect">
             <a:avLst/>
@@ -2247,8 +2245,8 @@
         </p:nvSpPr>
         <p:spPr>
           <a:xfrm>
-            <a:off x="990600" y="2143795"/>
-            <a:ext cx="9358503" cy="238869"/>
+            <a:off x="1028700" y="2143795"/>
+            <a:ext cx="9319832" cy="315441"/>
           </a:xfrm>
           <a:prstGeom prst="rect">
             <a:avLst/>
@@ -2262,12 +2260,12 @@
           <a:p>
             <a:pPr algn="l" indent="0" marL="0">
               <a:lnSpc>
-                <a:spcPts val="1881"/>
+                <a:spcPts val="2484"/>
               </a:lnSpc>
               <a:buNone/>
             </a:pPr>
             <a:r>
-              <a:rPr lang="de-DE" altLang="en-US" sz="1425" dirty="0">
+              <a:rPr lang="de-DE" altLang="en-US" sz="1800" dirty="0">
                 <a:solidFill>
                   <a:srgbClr val="5A6470"/>
                 </a:solidFill>
@@ -2277,7 +2275,7 @@
               </a:rPr>
               <a:t>Neukundenanteil sinkt, das Wachstum ist nicht nachhaltig</a:t>
             </a:r>
-            <a:endParaRPr lang="de-DE" sz="1425" dirty="0"/>
+            <a:endParaRPr lang="de-DE" sz="1800" dirty="0"/>
           </a:p>
         </p:txBody>
       </p:sp>
@@ -2289,13 +2287,11 @@
         </p:nvSpPr>
         <p:spPr>
           <a:xfrm>
-            <a:off x="685800" y="2913162"/>
-            <a:ext cx="95250" cy="95250"/>
+            <a:off x="685800" y="3027834"/>
+            <a:ext cx="133350" cy="19050"/>
           </a:xfrm>
-          <a:prstGeom prst="roundRect">
-            <a:avLst>
-              <a:gd name="adj" fmla="val 30000"/>
-            </a:avLst>
+          <a:prstGeom prst="rect">
+            <a:avLst/>
           </a:prstGeom>
           <a:solidFill>
             <a:srgbClr val="0A7C66"/>
@@ -2311,8 +2307,8 @@
         </p:nvSpPr>
         <p:spPr>
           <a:xfrm>
-            <a:off x="990600" y="2763664"/>
-            <a:ext cx="9358503" cy="394320"/>
+            <a:off x="1028700" y="2840236"/>
+            <a:ext cx="9319832" cy="394320"/>
           </a:xfrm>
           <a:prstGeom prst="rect">
             <a:avLst/>
@@ -2353,8 +2349,8 @@
         </p:nvSpPr>
         <p:spPr>
           <a:xfrm>
-            <a:off x="990600" y="3196084"/>
-            <a:ext cx="9358503" cy="238869"/>
+            <a:off x="1028700" y="3272656"/>
+            <a:ext cx="9319832" cy="315441"/>
           </a:xfrm>
           <a:prstGeom prst="rect">
             <a:avLst/>
@@ -2368,12 +2364,12 @@
           <a:p>
             <a:pPr algn="l" indent="0" marL="0">
               <a:lnSpc>
-                <a:spcPts val="1881"/>
+                <a:spcPts val="2484"/>
               </a:lnSpc>
               <a:buNone/>
             </a:pPr>
             <a:r>
-              <a:rPr lang="de-DE" altLang="en-US" sz="1425" dirty="0">
+              <a:rPr lang="de-DE" altLang="en-US" sz="1800" dirty="0">
                 <a:solidFill>
                   <a:srgbClr val="5A6470"/>
                 </a:solidFill>
@@ -2383,7 +2379,7 @@
               </a:rPr>
               <a:t>Durchschnittlich 62 offene Leads pro Mitarbeiter, Ziel sind 35</a:t>
             </a:r>
-            <a:endParaRPr lang="de-DE" sz="1425" dirty="0"/>
+            <a:endParaRPr lang="de-DE" sz="1800" dirty="0"/>
           </a:p>
         </p:txBody>
       </p:sp>
@@ -2395,13 +2391,11 @@
         </p:nvSpPr>
         <p:spPr>
           <a:xfrm>
-            <a:off x="685800" y="3965451"/>
-            <a:ext cx="95250" cy="95250"/>
+            <a:off x="685800" y="4156695"/>
+            <a:ext cx="133350" cy="19050"/>
           </a:xfrm>
-          <a:prstGeom prst="roundRect">
-            <a:avLst>
-              <a:gd name="adj" fmla="val 30000"/>
-            </a:avLst>
+          <a:prstGeom prst="rect">
+            <a:avLst/>
           </a:prstGeom>
           <a:solidFill>
             <a:srgbClr val="0A7C66"/>
@@ -2417,8 +2411,8 @@
         </p:nvSpPr>
         <p:spPr>
           <a:xfrm>
-            <a:off x="990600" y="3815953"/>
-            <a:ext cx="9358503" cy="394320"/>
+            <a:off x="1028700" y="3969097"/>
+            <a:ext cx="9319832" cy="394320"/>
           </a:xfrm>
           <a:prstGeom prst="rect">
             <a:avLst/>
@@ -2459,8 +2453,8 @@
         </p:nvSpPr>
         <p:spPr>
           <a:xfrm>
-            <a:off x="990600" y="4248373"/>
-            <a:ext cx="9358503" cy="238869"/>
+            <a:off x="1028700" y="4401517"/>
+            <a:ext cx="9319832" cy="315441"/>
           </a:xfrm>
           <a:prstGeom prst="rect">
             <a:avLst/>
@@ -2474,12 +2468,12 @@
           <a:p>
             <a:pPr algn="l" indent="0" marL="0">
               <a:lnSpc>
-                <a:spcPts val="1881"/>
+                <a:spcPts val="2484"/>
               </a:lnSpc>
               <a:buNone/>
             </a:pPr>
             <a:r>
-              <a:rPr lang="de-DE" altLang="en-US" sz="1425" dirty="0">
+              <a:rPr lang="de-DE" altLang="en-US" sz="1800" dirty="0">
                 <a:solidFill>
                   <a:srgbClr val="5A6470"/>
                 </a:solidFill>
@@ -2489,20 +2483,20 @@
               </a:rPr>
               <a:t>Amortisation nach sieben Monaten, Details auf Folie 6</a:t>
             </a:r>
-            <a:endParaRPr lang="de-DE" sz="1425" dirty="0"/>
+            <a:endParaRPr lang="de-DE" sz="1800" dirty="0"/>
           </a:p>
         </p:txBody>
       </p:sp>
       <p:sp>
         <p:nvSpPr>
-          <p:cNvPr id="13" name="!!dw:_footer.title"/>
+          <p:cNvPr id="13" name="!!dw:_footer.page"/>
           <p:cNvSpPr/>
           <p:nvPr/>
         </p:nvSpPr>
         <p:spPr>
           <a:xfrm>
-            <a:off x="685800" y="6450360"/>
-            <a:ext cx="1152139" cy="148530"/>
+            <a:off x="11239351" y="6450360"/>
+            <a:ext cx="270852" cy="148530"/>
           </a:xfrm>
           <a:prstGeom prst="rect">
             <a:avLst/>
@@ -2529,49 +2523,7 @@
                 <a:ea typeface="IBM Plex Sans" pitchFamily="34" charset="-122"/>
                 <a:cs typeface="IBM Plex Sans" pitchFamily="34" charset="-120"/>
               </a:rPr>
-              <a:t>Q3-Update Vertrieb</a:t>
-            </a:r>
-            <a:endParaRPr lang="de-DE" sz="975" dirty="0"/>
-          </a:p>
-        </p:txBody>
-      </p:sp>
-      <p:sp>
-        <p:nvSpPr>
-          <p:cNvPr id="14" name="!!dw:_footer.page"/>
-          <p:cNvSpPr/>
-          <p:nvPr/>
-        </p:nvSpPr>
-        <p:spPr>
-          <a:xfrm>
-            <a:off x="11429405" y="6450360"/>
-            <a:ext cx="77947" cy="148530"/>
-          </a:xfrm>
-          <a:prstGeom prst="rect">
-            <a:avLst/>
-          </a:prstGeom>
-          <a:noFill/>
-          <a:ln/>
-        </p:spPr>
-        <p:txBody>
-          <a:bodyPr wrap="square" lIns="0" tIns="0" rIns="0" bIns="0" rtlCol="0" anchor="t"/>
-          <a:lstStyle/>
-          <a:p>
-            <a:pPr algn="l" indent="0" marL="0">
-              <a:lnSpc>
-                <a:spcPts val="1170"/>
-              </a:lnSpc>
-              <a:buNone/>
-            </a:pPr>
-            <a:r>
-              <a:rPr lang="de-DE" altLang="en-US" sz="975" spc="20" kern="0" dirty="0">
-                <a:solidFill>
-                  <a:srgbClr val="5A6470"/>
-                </a:solidFill>
-                <a:latin typeface="IBM Plex Sans" pitchFamily="34" charset="0"/>
-                <a:ea typeface="IBM Plex Sans" pitchFamily="34" charset="-122"/>
-                <a:cs typeface="IBM Plex Sans" pitchFamily="34" charset="-120"/>
-              </a:rPr>
-              <a:t>2</a:t>
+              <a:t>2 / 8</a:t>
             </a:r>
             <a:endParaRPr lang="de-DE" sz="975" dirty="0"/>
           </a:p>
@@ -3503,7 +3455,7 @@
         <p:spPr>
           <a:xfrm>
             <a:off x="685800" y="864840"/>
-            <a:ext cx="9667875" cy="825103"/>
+            <a:ext cx="9667875" cy="912019"/>
           </a:xfrm>
           <a:prstGeom prst="rect">
             <a:avLst/>
@@ -3517,12 +3469,12 @@
           <a:p>
             <a:pPr algn="l" indent="0" marL="0">
               <a:lnSpc>
-                <a:spcPts val="3249"/>
+                <a:spcPts val="3591"/>
               </a:lnSpc>
               <a:buNone/>
             </a:pPr>
             <a:r>
-              <a:rPr lang="de-DE" altLang="en-US" sz="2850" b="1" spc="-43" kern="0" dirty="0">
+              <a:rPr lang="de-DE" altLang="en-US" sz="3150" b="1" spc="-47" kern="0" dirty="0">
                 <a:solidFill>
                   <a:srgbClr val="16202B"/>
                 </a:solidFill>
@@ -3532,17 +3484,17 @@
               </a:rPr>
               <a:t>Umsatz und Marge liegen über</a:t>
             </a:r>
-            <a:endParaRPr lang="de-DE" sz="2850" dirty="0"/>
+            <a:endParaRPr lang="de-DE" sz="3150" dirty="0"/>
           </a:p>
           <a:p>
             <a:pPr algn="l" indent="0" marL="0">
               <a:lnSpc>
-                <a:spcPts val="3249"/>
+                <a:spcPts val="3591"/>
               </a:lnSpc>
               <a:buNone/>
             </a:pPr>
             <a:r>
-              <a:rPr lang="de-DE" altLang="en-US" sz="2850" b="1" spc="-43" kern="0" dirty="0">
+              <a:rPr lang="de-DE" altLang="en-US" sz="3150" b="1" spc="-47" kern="0" dirty="0">
                 <a:solidFill>
                   <a:srgbClr val="16202B"/>
                 </a:solidFill>
@@ -3552,7 +3504,7 @@
               </a:rPr>
               <a:t>Plan, die Neukundenquote darunter</a:t>
             </a:r>
-            <a:endParaRPr lang="de-DE" sz="2850" dirty="0"/>
+            <a:endParaRPr lang="de-DE" sz="3150" dirty="0"/>
           </a:p>
         </p:txBody>
       </p:sp>
@@ -3564,8 +3516,8 @@
         </p:nvSpPr>
         <p:spPr>
           <a:xfrm>
-            <a:off x="685800" y="2080468"/>
-            <a:ext cx="3271242" cy="1863700"/>
+            <a:off x="685800" y="2167384"/>
+            <a:ext cx="3271242" cy="2168723"/>
           </a:xfrm>
           <a:prstGeom prst="rect">
             <a:avLst/>
@@ -3581,8 +3533,8 @@
         </p:nvSpPr>
         <p:spPr>
           <a:xfrm>
-            <a:off x="685800" y="2156668"/>
-            <a:ext cx="2401410" cy="775097"/>
+            <a:off x="685800" y="2243584"/>
+            <a:ext cx="2377769" cy="1080120"/>
           </a:xfrm>
           <a:prstGeom prst="rect">
             <a:avLst/>
@@ -3596,12 +3548,12 @@
           <a:p>
             <a:pPr algn="l" indent="0" marL="0">
               <a:lnSpc>
-                <a:spcPts val="6103"/>
+                <a:spcPts val="8505"/>
               </a:lnSpc>
               <a:buNone/>
             </a:pPr>
             <a:r>
-              <a:rPr lang="de-DE" altLang="en-US" sz="5813" b="1" spc="-174" kern="0" dirty="0">
+              <a:rPr lang="de-DE" altLang="en-US" sz="8100" b="1" spc="-243" kern="0" dirty="0">
                 <a:solidFill>
                   <a:srgbClr val="0A7C66"/>
                 </a:solidFill>
@@ -3609,9 +3561,26 @@
                 <a:ea typeface="IBM Plex Sans" pitchFamily="34" charset="-122"/>
                 <a:cs typeface="IBM Plex Sans" pitchFamily="34" charset="-120"/>
               </a:rPr>
-              <a:t>4,8 Mio</a:t>
+              <a:t>4,8</a:t>
             </a:r>
-            <a:endParaRPr lang="de-DE" sz="5813" dirty="0"/>
+            <a:pPr algn="l" indent="0" marL="0">
+              <a:lnSpc>
+                <a:spcPts val="8505"/>
+              </a:lnSpc>
+              <a:buNone/>
+            </a:pPr>
+            <a:r>
+              <a:rPr lang="de-DE" altLang="en-US" sz="3645" b="1" spc="0" kern="0" dirty="0">
+                <a:solidFill>
+                  <a:srgbClr val="0A7C66"/>
+                </a:solidFill>
+                <a:latin typeface="IBM Plex Sans" pitchFamily="34" charset="0"/>
+                <a:ea typeface="IBM Plex Sans" pitchFamily="34" charset="-122"/>
+                <a:cs typeface="IBM Plex Sans" pitchFamily="34" charset="-120"/>
+              </a:rPr>
+              <a:t> Mio</a:t>
+            </a:r>
+            <a:endParaRPr lang="de-DE" sz="8100" dirty="0"/>
           </a:p>
         </p:txBody>
       </p:sp>
@@ -3623,8 +3592,8 @@
         </p:nvSpPr>
         <p:spPr>
           <a:xfrm>
-            <a:off x="685800" y="3027015"/>
-            <a:ext cx="2401410" cy="477738"/>
+            <a:off x="685800" y="3418954"/>
+            <a:ext cx="2377769" cy="477738"/>
           </a:xfrm>
           <a:prstGeom prst="rect">
             <a:avLst/>
@@ -3673,7 +3642,7 @@
         </p:blipFill>
         <p:spPr>
           <a:xfrm>
-            <a:off x="685800" y="3667274"/>
+            <a:off x="685800" y="4059213"/>
             <a:ext cx="171450" cy="171450"/>
           </a:xfrm>
           <a:prstGeom prst="rect">
@@ -3689,7 +3658,7 @@
         </p:nvSpPr>
         <p:spPr>
           <a:xfrm>
-            <a:off x="914400" y="3638104"/>
+            <a:off x="914400" y="4030042"/>
             <a:ext cx="1043375" cy="229865"/>
           </a:xfrm>
           <a:prstGeom prst="rect">
@@ -3731,8 +3700,8 @@
         </p:nvSpPr>
         <p:spPr>
           <a:xfrm>
-            <a:off x="3957042" y="2080468"/>
-            <a:ext cx="2516386" cy="1863700"/>
+            <a:off x="3957042" y="2167384"/>
+            <a:ext cx="2516386" cy="2168723"/>
           </a:xfrm>
           <a:prstGeom prst="rect">
             <a:avLst/>
@@ -3748,8 +3717,8 @@
         </p:nvSpPr>
         <p:spPr>
           <a:xfrm>
-            <a:off x="3957042" y="2156668"/>
-            <a:ext cx="19050" cy="1711300"/>
+            <a:off x="3957042" y="2243584"/>
+            <a:ext cx="19050" cy="2016323"/>
           </a:xfrm>
           <a:prstGeom prst="rect">
             <a:avLst/>
@@ -3768,8 +3737,8 @@
         </p:nvSpPr>
         <p:spPr>
           <a:xfrm>
-            <a:off x="4223742" y="2294781"/>
-            <a:ext cx="1882214" cy="620018"/>
+            <a:off x="4223742" y="2548384"/>
+            <a:ext cx="1764236" cy="720030"/>
           </a:xfrm>
           <a:prstGeom prst="rect">
             <a:avLst/>
@@ -3783,12 +3752,12 @@
           <a:p>
             <a:pPr algn="l" indent="0" marL="0">
               <a:lnSpc>
-                <a:spcPts val="4883"/>
+                <a:spcPts val="5670"/>
               </a:lnSpc>
               <a:buNone/>
             </a:pPr>
             <a:r>
-              <a:rPr lang="de-DE" altLang="en-US" sz="4650" b="1" spc="-139" kern="0" dirty="0">
+              <a:rPr lang="de-DE" altLang="en-US" sz="5400" b="1" spc="-162" kern="0" dirty="0">
                 <a:solidFill>
                   <a:srgbClr val="16202B"/>
                 </a:solidFill>
@@ -3796,9 +3765,26 @@
                 <a:ea typeface="IBM Plex Sans" pitchFamily="34" charset="-122"/>
                 <a:cs typeface="IBM Plex Sans" pitchFamily="34" charset="-120"/>
               </a:rPr>
-              <a:t>31,4 %</a:t>
+              <a:t>31,4</a:t>
             </a:r>
-            <a:endParaRPr lang="de-DE" sz="4650" dirty="0"/>
+            <a:pPr algn="l" indent="0" marL="0">
+              <a:lnSpc>
+                <a:spcPts val="5670"/>
+              </a:lnSpc>
+              <a:buNone/>
+            </a:pPr>
+            <a:r>
+              <a:rPr lang="de-DE" altLang="en-US" sz="2430" b="1" spc="0" kern="0" dirty="0">
+                <a:solidFill>
+                  <a:srgbClr val="16202B"/>
+                </a:solidFill>
+                <a:latin typeface="IBM Plex Sans" pitchFamily="34" charset="0"/>
+                <a:ea typeface="IBM Plex Sans" pitchFamily="34" charset="-122"/>
+                <a:cs typeface="IBM Plex Sans" pitchFamily="34" charset="-120"/>
+              </a:rPr>
+              <a:t> %</a:t>
+            </a:r>
+            <a:endParaRPr lang="de-DE" sz="5400" dirty="0"/>
           </a:p>
         </p:txBody>
       </p:sp>
@@ -3810,8 +3796,8 @@
         </p:nvSpPr>
         <p:spPr>
           <a:xfrm>
-            <a:off x="4223742" y="3027015"/>
-            <a:ext cx="1882214" cy="477738"/>
+            <a:off x="4223742" y="3418954"/>
+            <a:ext cx="1764236" cy="477738"/>
           </a:xfrm>
           <a:prstGeom prst="rect">
             <a:avLst/>
@@ -3860,7 +3846,7 @@
         </p:blipFill>
         <p:spPr>
           <a:xfrm>
-            <a:off x="4223742" y="3667274"/>
+            <a:off x="4223742" y="4059213"/>
             <a:ext cx="171450" cy="171450"/>
           </a:xfrm>
           <a:prstGeom prst="rect">
@@ -3876,7 +3862,7 @@
         </p:nvSpPr>
         <p:spPr>
           <a:xfrm>
-            <a:off x="4452342" y="3638104"/>
+            <a:off x="4452342" y="4030042"/>
             <a:ext cx="700543" cy="229865"/>
           </a:xfrm>
           <a:prstGeom prst="rect">
@@ -3918,8 +3904,8 @@
         </p:nvSpPr>
         <p:spPr>
           <a:xfrm>
-            <a:off x="6473428" y="2080468"/>
-            <a:ext cx="2516386" cy="1863700"/>
+            <a:off x="6473428" y="2167384"/>
+            <a:ext cx="2516386" cy="2168723"/>
           </a:xfrm>
           <a:prstGeom prst="rect">
             <a:avLst/>
@@ -3935,8 +3921,8 @@
         </p:nvSpPr>
         <p:spPr>
           <a:xfrm>
-            <a:off x="6473428" y="2156668"/>
-            <a:ext cx="19050" cy="1711300"/>
+            <a:off x="6473428" y="2243584"/>
+            <a:ext cx="19050" cy="2016323"/>
           </a:xfrm>
           <a:prstGeom prst="rect">
             <a:avLst/>
@@ -3955,8 +3941,8 @@
         </p:nvSpPr>
         <p:spPr>
           <a:xfrm>
-            <a:off x="6740128" y="2294781"/>
-            <a:ext cx="2012731" cy="620018"/>
+            <a:off x="6740128" y="2548384"/>
+            <a:ext cx="2012731" cy="720030"/>
           </a:xfrm>
           <a:prstGeom prst="rect">
             <a:avLst/>
@@ -3970,12 +3956,12 @@
           <a:p>
             <a:pPr algn="l" indent="0" marL="0">
               <a:lnSpc>
-                <a:spcPts val="4883"/>
+                <a:spcPts val="5670"/>
               </a:lnSpc>
               <a:buNone/>
             </a:pPr>
             <a:r>
-              <a:rPr lang="de-DE" altLang="en-US" sz="4650" b="1" spc="-139" kern="0" dirty="0">
+              <a:rPr lang="de-DE" altLang="en-US" sz="5400" b="1" spc="-162" kern="0" dirty="0">
                 <a:solidFill>
                   <a:srgbClr val="16202B"/>
                 </a:solidFill>
@@ -3983,9 +3969,26 @@
                 <a:ea typeface="IBM Plex Sans" pitchFamily="34" charset="-122"/>
                 <a:cs typeface="IBM Plex Sans" pitchFamily="34" charset="-120"/>
               </a:rPr>
-              <a:t>18 %</a:t>
+              <a:t>18</a:t>
             </a:r>
-            <a:endParaRPr lang="de-DE" sz="4650" dirty="0"/>
+            <a:pPr algn="l" indent="0" marL="0">
+              <a:lnSpc>
+                <a:spcPts val="5670"/>
+              </a:lnSpc>
+              <a:buNone/>
+            </a:pPr>
+            <a:r>
+              <a:rPr lang="de-DE" altLang="en-US" sz="2430" b="1" spc="0" kern="0" dirty="0">
+                <a:solidFill>
+                  <a:srgbClr val="16202B"/>
+                </a:solidFill>
+                <a:latin typeface="IBM Plex Sans" pitchFamily="34" charset="0"/>
+                <a:ea typeface="IBM Plex Sans" pitchFamily="34" charset="-122"/>
+                <a:cs typeface="IBM Plex Sans" pitchFamily="34" charset="-120"/>
+              </a:rPr>
+              <a:t> %</a:t>
+            </a:r>
+            <a:endParaRPr lang="de-DE" sz="5400" dirty="0"/>
           </a:p>
         </p:txBody>
       </p:sp>
@@ -3997,7 +4000,7 @@
         </p:nvSpPr>
         <p:spPr>
           <a:xfrm>
-            <a:off x="6740128" y="3027015"/>
+            <a:off x="6740128" y="3418954"/>
             <a:ext cx="2012731" cy="477738"/>
           </a:xfrm>
           <a:prstGeom prst="rect">
@@ -4047,7 +4050,7 @@
         </p:blipFill>
         <p:spPr>
           <a:xfrm>
-            <a:off x="6740128" y="3667274"/>
+            <a:off x="6740128" y="4059213"/>
             <a:ext cx="171450" cy="171450"/>
           </a:xfrm>
           <a:prstGeom prst="rect">
@@ -4063,7 +4066,7 @@
         </p:nvSpPr>
         <p:spPr>
           <a:xfrm>
-            <a:off x="6968728" y="3638104"/>
+            <a:off x="6968728" y="4030042"/>
             <a:ext cx="1198212" cy="229865"/>
           </a:xfrm>
           <a:prstGeom prst="rect">
@@ -4105,8 +4108,8 @@
         </p:nvSpPr>
         <p:spPr>
           <a:xfrm>
-            <a:off x="8989814" y="2080468"/>
-            <a:ext cx="2516312" cy="1863700"/>
+            <a:off x="8989814" y="2167384"/>
+            <a:ext cx="2516312" cy="2168723"/>
           </a:xfrm>
           <a:prstGeom prst="rect">
             <a:avLst/>
@@ -4122,8 +4125,8 @@
         </p:nvSpPr>
         <p:spPr>
           <a:xfrm>
-            <a:off x="8989814" y="2156668"/>
-            <a:ext cx="19050" cy="1711300"/>
+            <a:off x="8989814" y="2243584"/>
+            <a:ext cx="19050" cy="2016323"/>
           </a:xfrm>
           <a:prstGeom prst="rect">
             <a:avLst/>
@@ -4142,8 +4145,8 @@
         </p:nvSpPr>
         <p:spPr>
           <a:xfrm>
-            <a:off x="9256514" y="2294781"/>
-            <a:ext cx="2012655" cy="620018"/>
+            <a:off x="9256514" y="2548384"/>
+            <a:ext cx="2012655" cy="720030"/>
           </a:xfrm>
           <a:prstGeom prst="rect">
             <a:avLst/>
@@ -4157,12 +4160,12 @@
           <a:p>
             <a:pPr algn="l" indent="0" marL="0">
               <a:lnSpc>
-                <a:spcPts val="4883"/>
+                <a:spcPts val="5670"/>
               </a:lnSpc>
               <a:buNone/>
             </a:pPr>
             <a:r>
-              <a:rPr lang="de-DE" altLang="en-US" sz="4650" b="1" spc="-139" kern="0" dirty="0">
+              <a:rPr lang="de-DE" altLang="en-US" sz="5400" b="1" spc="-162" kern="0" dirty="0">
                 <a:solidFill>
                   <a:srgbClr val="16202B"/>
                 </a:solidFill>
@@ -4172,7 +4175,7 @@
               </a:rPr>
               <a:t>62</a:t>
             </a:r>
-            <a:endParaRPr lang="de-DE" sz="4650" dirty="0"/>
+            <a:endParaRPr lang="de-DE" sz="5400" dirty="0"/>
           </a:p>
         </p:txBody>
       </p:sp>
@@ -4184,7 +4187,7 @@
         </p:nvSpPr>
         <p:spPr>
           <a:xfrm>
-            <a:off x="9256514" y="3027015"/>
+            <a:off x="9256514" y="3418954"/>
             <a:ext cx="2012655" cy="477738"/>
           </a:xfrm>
           <a:prstGeom prst="rect">
@@ -4226,7 +4229,7 @@
         </p:nvSpPr>
         <p:spPr>
           <a:xfrm>
-            <a:off x="9256514" y="3638104"/>
+            <a:off x="9256514" y="4030042"/>
             <a:ext cx="579242" cy="229865"/>
           </a:xfrm>
           <a:prstGeom prst="rect">
@@ -4304,14 +4307,14 @@
       </p:sp>
       <p:sp>
         <p:nvSpPr>
-          <p:cNvPr id="27" name="!!dw:_footer.title"/>
+          <p:cNvPr id="27" name="!!dw:_footer.page"/>
           <p:cNvSpPr/>
           <p:nvPr/>
         </p:nvSpPr>
         <p:spPr>
           <a:xfrm>
-            <a:off x="685800" y="6450360"/>
-            <a:ext cx="1152139" cy="148530"/>
+            <a:off x="11239351" y="6450360"/>
+            <a:ext cx="270852" cy="148530"/>
           </a:xfrm>
           <a:prstGeom prst="rect">
             <a:avLst/>
@@ -4338,49 +4341,7 @@
                 <a:ea typeface="IBM Plex Sans" pitchFamily="34" charset="-122"/>
                 <a:cs typeface="IBM Plex Sans" pitchFamily="34" charset="-120"/>
               </a:rPr>
-              <a:t>Q3-Update Vertrieb</a:t>
-            </a:r>
-            <a:endParaRPr lang="de-DE" sz="975" dirty="0"/>
-          </a:p>
-        </p:txBody>
-      </p:sp>
-      <p:sp>
-        <p:nvSpPr>
-          <p:cNvPr id="28" name="!!dw:_footer.page"/>
-          <p:cNvSpPr/>
-          <p:nvPr/>
-        </p:nvSpPr>
-        <p:spPr>
-          <a:xfrm>
-            <a:off x="11429405" y="6450360"/>
-            <a:ext cx="77947" cy="148530"/>
-          </a:xfrm>
-          <a:prstGeom prst="rect">
-            <a:avLst/>
-          </a:prstGeom>
-          <a:noFill/>
-          <a:ln/>
-        </p:spPr>
-        <p:txBody>
-          <a:bodyPr wrap="square" lIns="0" tIns="0" rIns="0" bIns="0" rtlCol="0" anchor="t"/>
-          <a:lstStyle/>
-          <a:p>
-            <a:pPr algn="l" indent="0" marL="0">
-              <a:lnSpc>
-                <a:spcPts val="1170"/>
-              </a:lnSpc>
-              <a:buNone/>
-            </a:pPr>
-            <a:r>
-              <a:rPr lang="de-DE" altLang="en-US" sz="975" spc="20" kern="0" dirty="0">
-                <a:solidFill>
-                  <a:srgbClr val="5A6470"/>
-                </a:solidFill>
-                <a:latin typeface="IBM Plex Sans" pitchFamily="34" charset="0"/>
-                <a:ea typeface="IBM Plex Sans" pitchFamily="34" charset="-122"/>
-                <a:cs typeface="IBM Plex Sans" pitchFamily="34" charset="-120"/>
-              </a:rPr>
-              <a:t>3</a:t>
+              <a:t>3 / 8</a:t>
             </a:r>
             <a:endParaRPr lang="de-DE" sz="975" dirty="0"/>
           </a:p>
@@ -6464,14 +6425,9 @@
             <a:off x="8362950" y="2167384"/>
             <a:ext cx="3143250" cy="3684836"/>
           </a:xfrm>
-          <a:prstGeom prst="roundRect">
-            <a:avLst>
-              <a:gd name="adj" fmla="val 606"/>
-            </a:avLst>
+          <a:prstGeom prst="rect">
+            <a:avLst/>
           </a:prstGeom>
-          <a:solidFill>
-            <a:srgbClr val="E9F1EF"/>
-          </a:solidFill>
           <a:ln/>
         </p:spPr>
       </p:sp>
@@ -6483,8 +6439,8 @@
         </p:nvSpPr>
         <p:spPr>
           <a:xfrm>
-            <a:off x="8667750" y="2961754"/>
-            <a:ext cx="2571655" cy="720030"/>
+            <a:off x="8362950" y="2434084"/>
+            <a:ext cx="3190399" cy="720030"/>
           </a:xfrm>
           <a:prstGeom prst="rect">
             <a:avLst/>
@@ -6525,8 +6481,8 @@
         </p:nvSpPr>
         <p:spPr>
           <a:xfrm>
-            <a:off x="8667750" y="3796085"/>
-            <a:ext cx="2571655" cy="1261765"/>
+            <a:off x="8362950" y="3268414"/>
+            <a:ext cx="3190399" cy="946324"/>
           </a:xfrm>
           <a:prstGeom prst="rect">
             <a:avLst/>
@@ -6603,14 +6559,14 @@
       </p:sp>
       <p:sp>
         <p:nvSpPr>
-          <p:cNvPr id="10" name="!!dw:_footer.title"/>
+          <p:cNvPr id="10" name="!!dw:_footer.page"/>
           <p:cNvSpPr/>
           <p:nvPr/>
         </p:nvSpPr>
         <p:spPr>
           <a:xfrm>
-            <a:off x="685800" y="6450360"/>
-            <a:ext cx="1152139" cy="148530"/>
+            <a:off x="11239351" y="6450360"/>
+            <a:ext cx="270852" cy="148530"/>
           </a:xfrm>
           <a:prstGeom prst="rect">
             <a:avLst/>
@@ -6637,49 +6593,7 @@
                 <a:ea typeface="IBM Plex Sans" pitchFamily="34" charset="-122"/>
                 <a:cs typeface="IBM Plex Sans" pitchFamily="34" charset="-120"/>
               </a:rPr>
-              <a:t>Q3-Update Vertrieb</a:t>
-            </a:r>
-            <a:endParaRPr lang="de-DE" sz="975" dirty="0"/>
-          </a:p>
-        </p:txBody>
-      </p:sp>
-      <p:sp>
-        <p:nvSpPr>
-          <p:cNvPr id="11" name="!!dw:_footer.page"/>
-          <p:cNvSpPr/>
-          <p:nvPr/>
-        </p:nvSpPr>
-        <p:spPr>
-          <a:xfrm>
-            <a:off x="11429405" y="6450360"/>
-            <a:ext cx="77947" cy="148530"/>
-          </a:xfrm>
-          <a:prstGeom prst="rect">
-            <a:avLst/>
-          </a:prstGeom>
-          <a:noFill/>
-          <a:ln/>
-        </p:spPr>
-        <p:txBody>
-          <a:bodyPr wrap="square" lIns="0" tIns="0" rIns="0" bIns="0" rtlCol="0" anchor="t"/>
-          <a:lstStyle/>
-          <a:p>
-            <a:pPr algn="l" indent="0" marL="0">
-              <a:lnSpc>
-                <a:spcPts val="1170"/>
-              </a:lnSpc>
-              <a:buNone/>
-            </a:pPr>
-            <a:r>
-              <a:rPr lang="de-DE" altLang="en-US" sz="975" spc="20" kern="0" dirty="0">
-                <a:solidFill>
-                  <a:srgbClr val="5A6470"/>
-                </a:solidFill>
-                <a:latin typeface="IBM Plex Sans" pitchFamily="34" charset="0"/>
-                <a:ea typeface="IBM Plex Sans" pitchFamily="34" charset="-122"/>
-                <a:cs typeface="IBM Plex Sans" pitchFamily="34" charset="-120"/>
-              </a:rPr>
-              <a:t>4</a:t>
+              <a:t>4 / 8</a:t>
             </a:r>
             <a:endParaRPr lang="de-DE" sz="975" dirty="0"/>
           </a:p>
@@ -7057,16 +6971,11 @@
         <p:spPr>
           <a:xfrm>
             <a:off x="685800" y="2167384"/>
-            <a:ext cx="5276850" cy="2363986"/>
+            <a:ext cx="5276850" cy="2287786"/>
           </a:xfrm>
-          <a:prstGeom prst="roundRect">
-            <a:avLst>
-              <a:gd name="adj" fmla="val 806"/>
-            </a:avLst>
+          <a:prstGeom prst="rect">
+            <a:avLst/>
           </a:prstGeom>
-          <a:solidFill>
-            <a:srgbClr val="F4F5F6"/>
-          </a:solidFill>
           <a:ln/>
         </p:spPr>
       </p:sp>
@@ -7078,8 +6987,8 @@
         </p:nvSpPr>
         <p:spPr>
           <a:xfrm>
-            <a:off x="952500" y="2357884"/>
-            <a:ext cx="4814602" cy="302121"/>
+            <a:off x="685800" y="2434084"/>
+            <a:ext cx="5356003" cy="302121"/>
           </a:xfrm>
           <a:prstGeom prst="rect">
             <a:avLst/>
@@ -7120,13 +7029,11 @@
         </p:nvSpPr>
         <p:spPr>
           <a:xfrm>
-            <a:off x="952500" y="2912938"/>
-            <a:ext cx="76200" cy="76200"/>
+            <a:off x="685800" y="3017713"/>
+            <a:ext cx="133350" cy="19050"/>
           </a:xfrm>
-          <a:prstGeom prst="ellipse">
-            <a:avLst>
-              <a:gd name="adj" fmla="val 50000"/>
-            </a:avLst>
+          <a:prstGeom prst="rect">
+            <a:avLst/>
           </a:prstGeom>
           <a:solidFill>
             <a:srgbClr val="0A7C66"/>
@@ -7142,8 +7049,8 @@
         </p:nvSpPr>
         <p:spPr>
           <a:xfrm>
-            <a:off x="1162050" y="2793355"/>
-            <a:ext cx="4601909" cy="315441"/>
+            <a:off x="952500" y="2869555"/>
+            <a:ext cx="5085302" cy="315441"/>
           </a:xfrm>
           <a:prstGeom prst="rect">
             <a:avLst/>
@@ -7184,13 +7091,11 @@
         </p:nvSpPr>
         <p:spPr>
           <a:xfrm>
-            <a:off x="952500" y="3323630"/>
-            <a:ext cx="76200" cy="76200"/>
+            <a:off x="685800" y="3428405"/>
+            <a:ext cx="133350" cy="19050"/>
           </a:xfrm>
-          <a:prstGeom prst="ellipse">
-            <a:avLst>
-              <a:gd name="adj" fmla="val 50000"/>
-            </a:avLst>
+          <a:prstGeom prst="rect">
+            <a:avLst/>
           </a:prstGeom>
           <a:solidFill>
             <a:srgbClr val="0A7C66"/>
@@ -7206,8 +7111,8 @@
         </p:nvSpPr>
         <p:spPr>
           <a:xfrm>
-            <a:off x="1162050" y="3204046"/>
-            <a:ext cx="4601909" cy="315441"/>
+            <a:off x="952500" y="3280246"/>
+            <a:ext cx="5085302" cy="315441"/>
           </a:xfrm>
           <a:prstGeom prst="rect">
             <a:avLst/>
@@ -7248,13 +7153,11 @@
         </p:nvSpPr>
         <p:spPr>
           <a:xfrm>
-            <a:off x="952500" y="3734321"/>
-            <a:ext cx="76200" cy="76200"/>
+            <a:off x="685800" y="3839096"/>
+            <a:ext cx="133350" cy="19050"/>
           </a:xfrm>
-          <a:prstGeom prst="ellipse">
-            <a:avLst>
-              <a:gd name="adj" fmla="val 50000"/>
-            </a:avLst>
+          <a:prstGeom prst="rect">
+            <a:avLst/>
           </a:prstGeom>
           <a:solidFill>
             <a:srgbClr val="0A7C66"/>
@@ -7270,8 +7173,8 @@
         </p:nvSpPr>
         <p:spPr>
           <a:xfrm>
-            <a:off x="1162050" y="3614738"/>
-            <a:ext cx="4601909" cy="315441"/>
+            <a:off x="952500" y="3690937"/>
+            <a:ext cx="5085302" cy="315441"/>
           </a:xfrm>
           <a:prstGeom prst="rect">
             <a:avLst/>
@@ -7312,13 +7215,11 @@
         </p:nvSpPr>
         <p:spPr>
           <a:xfrm>
-            <a:off x="952500" y="4145012"/>
-            <a:ext cx="76200" cy="76200"/>
+            <a:off x="685800" y="4249787"/>
+            <a:ext cx="133350" cy="19050"/>
           </a:xfrm>
-          <a:prstGeom prst="ellipse">
-            <a:avLst>
-              <a:gd name="adj" fmla="val 50000"/>
-            </a:avLst>
+          <a:prstGeom prst="rect">
+            <a:avLst/>
           </a:prstGeom>
           <a:solidFill>
             <a:srgbClr val="0A7C66"/>
@@ -7334,8 +7235,8 @@
         </p:nvSpPr>
         <p:spPr>
           <a:xfrm>
-            <a:off x="1162050" y="4025429"/>
-            <a:ext cx="4601909" cy="315441"/>
+            <a:off x="952500" y="4101629"/>
+            <a:ext cx="5085302" cy="315441"/>
           </a:xfrm>
           <a:prstGeom prst="rect">
             <a:avLst/>
@@ -7377,16 +7278,11 @@
         <p:spPr>
           <a:xfrm>
             <a:off x="6229350" y="2167384"/>
-            <a:ext cx="5276850" cy="2363986"/>
+            <a:ext cx="5276850" cy="2287786"/>
           </a:xfrm>
-          <a:prstGeom prst="roundRect">
-            <a:avLst>
-              <a:gd name="adj" fmla="val 806"/>
-            </a:avLst>
+          <a:prstGeom prst="rect">
+            <a:avLst/>
           </a:prstGeom>
-          <a:solidFill>
-            <a:srgbClr val="F4F5F6"/>
-          </a:solidFill>
           <a:ln/>
         </p:spPr>
       </p:sp>
@@ -7398,8 +7294,8 @@
         </p:nvSpPr>
         <p:spPr>
           <a:xfrm>
-            <a:off x="6496050" y="2357884"/>
-            <a:ext cx="4814602" cy="302121"/>
+            <a:off x="6229350" y="2434084"/>
+            <a:ext cx="5356003" cy="302121"/>
           </a:xfrm>
           <a:prstGeom prst="rect">
             <a:avLst/>
@@ -7440,13 +7336,11 @@
         </p:nvSpPr>
         <p:spPr>
           <a:xfrm>
-            <a:off x="6496050" y="2912938"/>
-            <a:ext cx="76200" cy="76200"/>
+            <a:off x="6229350" y="3017713"/>
+            <a:ext cx="133350" cy="19050"/>
           </a:xfrm>
-          <a:prstGeom prst="ellipse">
-            <a:avLst>
-              <a:gd name="adj" fmla="val 50000"/>
-            </a:avLst>
+          <a:prstGeom prst="rect">
+            <a:avLst/>
           </a:prstGeom>
           <a:solidFill>
             <a:srgbClr val="0A7C66"/>
@@ -7462,8 +7356,8 @@
         </p:nvSpPr>
         <p:spPr>
           <a:xfrm>
-            <a:off x="6705600" y="2793355"/>
-            <a:ext cx="4601909" cy="315441"/>
+            <a:off x="6496050" y="2869555"/>
+            <a:ext cx="5085302" cy="315441"/>
           </a:xfrm>
           <a:prstGeom prst="rect">
             <a:avLst/>
@@ -7504,13 +7398,11 @@
         </p:nvSpPr>
         <p:spPr>
           <a:xfrm>
-            <a:off x="6496050" y="3323630"/>
-            <a:ext cx="76200" cy="76200"/>
+            <a:off x="6229350" y="3428405"/>
+            <a:ext cx="133350" cy="19050"/>
           </a:xfrm>
-          <a:prstGeom prst="ellipse">
-            <a:avLst>
-              <a:gd name="adj" fmla="val 50000"/>
-            </a:avLst>
+          <a:prstGeom prst="rect">
+            <a:avLst/>
           </a:prstGeom>
           <a:solidFill>
             <a:srgbClr val="0A7C66"/>
@@ -7526,8 +7418,8 @@
         </p:nvSpPr>
         <p:spPr>
           <a:xfrm>
-            <a:off x="6705600" y="3204046"/>
-            <a:ext cx="4601909" cy="315441"/>
+            <a:off x="6496050" y="3280246"/>
+            <a:ext cx="5085302" cy="315441"/>
           </a:xfrm>
           <a:prstGeom prst="rect">
             <a:avLst/>
@@ -7568,13 +7460,11 @@
         </p:nvSpPr>
         <p:spPr>
           <a:xfrm>
-            <a:off x="6496050" y="3734321"/>
-            <a:ext cx="76200" cy="76200"/>
+            <a:off x="6229350" y="3839096"/>
+            <a:ext cx="133350" cy="19050"/>
           </a:xfrm>
-          <a:prstGeom prst="ellipse">
-            <a:avLst>
-              <a:gd name="adj" fmla="val 50000"/>
-            </a:avLst>
+          <a:prstGeom prst="rect">
+            <a:avLst/>
           </a:prstGeom>
           <a:solidFill>
             <a:srgbClr val="0A7C66"/>
@@ -7590,8 +7480,8 @@
         </p:nvSpPr>
         <p:spPr>
           <a:xfrm>
-            <a:off x="6705600" y="3614738"/>
-            <a:ext cx="4601909" cy="315441"/>
+            <a:off x="6496050" y="3690937"/>
+            <a:ext cx="5085302" cy="315441"/>
           </a:xfrm>
           <a:prstGeom prst="rect">
             <a:avLst/>
@@ -7632,13 +7522,11 @@
         </p:nvSpPr>
         <p:spPr>
           <a:xfrm>
-            <a:off x="6496050" y="4145012"/>
-            <a:ext cx="76200" cy="76200"/>
+            <a:off x="6229350" y="4249787"/>
+            <a:ext cx="133350" cy="19050"/>
           </a:xfrm>
-          <a:prstGeom prst="ellipse">
-            <a:avLst>
-              <a:gd name="adj" fmla="val 50000"/>
-            </a:avLst>
+          <a:prstGeom prst="rect">
+            <a:avLst/>
           </a:prstGeom>
           <a:solidFill>
             <a:srgbClr val="0A7C66"/>
@@ -7654,8 +7542,8 @@
         </p:nvSpPr>
         <p:spPr>
           <a:xfrm>
-            <a:off x="6705600" y="4025429"/>
-            <a:ext cx="4601909" cy="315441"/>
+            <a:off x="6496050" y="4101629"/>
+            <a:ext cx="5085302" cy="315441"/>
           </a:xfrm>
           <a:prstGeom prst="rect">
             <a:avLst/>
@@ -7690,14 +7578,14 @@
       </p:sp>
       <p:sp>
         <p:nvSpPr>
-          <p:cNvPr id="24" name="!!dw:_footer.title"/>
+          <p:cNvPr id="24" name="!!dw:_footer.page"/>
           <p:cNvSpPr/>
           <p:nvPr/>
         </p:nvSpPr>
         <p:spPr>
           <a:xfrm>
-            <a:off x="685800" y="6450360"/>
-            <a:ext cx="1152139" cy="148530"/>
+            <a:off x="11239351" y="6450360"/>
+            <a:ext cx="270852" cy="148530"/>
           </a:xfrm>
           <a:prstGeom prst="rect">
             <a:avLst/>
@@ -7724,49 +7612,7 @@
                 <a:ea typeface="IBM Plex Sans" pitchFamily="34" charset="-122"/>
                 <a:cs typeface="IBM Plex Sans" pitchFamily="34" charset="-120"/>
               </a:rPr>
-              <a:t>Q3-Update Vertrieb</a:t>
-            </a:r>
-            <a:endParaRPr lang="de-DE" sz="975" dirty="0"/>
-          </a:p>
-        </p:txBody>
-      </p:sp>
-      <p:sp>
-        <p:nvSpPr>
-          <p:cNvPr id="25" name="!!dw:_footer.page"/>
-          <p:cNvSpPr/>
-          <p:nvPr/>
-        </p:nvSpPr>
-        <p:spPr>
-          <a:xfrm>
-            <a:off x="11429405" y="6450360"/>
-            <a:ext cx="77947" cy="148530"/>
-          </a:xfrm>
-          <a:prstGeom prst="rect">
-            <a:avLst/>
-          </a:prstGeom>
-          <a:noFill/>
-          <a:ln/>
-        </p:spPr>
-        <p:txBody>
-          <a:bodyPr wrap="square" lIns="0" tIns="0" rIns="0" bIns="0" rtlCol="0" anchor="t"/>
-          <a:lstStyle/>
-          <a:p>
-            <a:pPr algn="l" indent="0" marL="0">
-              <a:lnSpc>
-                <a:spcPts val="1170"/>
-              </a:lnSpc>
-              <a:buNone/>
-            </a:pPr>
-            <a:r>
-              <a:rPr lang="de-DE" altLang="en-US" sz="975" spc="20" kern="0" dirty="0">
-                <a:solidFill>
-                  <a:srgbClr val="5A6470"/>
-                </a:solidFill>
-                <a:latin typeface="IBM Plex Sans" pitchFamily="34" charset="0"/>
-                <a:ea typeface="IBM Plex Sans" pitchFamily="34" charset="-122"/>
-                <a:cs typeface="IBM Plex Sans" pitchFamily="34" charset="-120"/>
-              </a:rPr>
-              <a:t>5</a:t>
+              <a:t>5 / 8</a:t>
             </a:r>
             <a:endParaRPr lang="de-DE" sz="975" dirty="0"/>
           </a:p>
@@ -9628,13 +9474,11 @@
         </p:nvSpPr>
         <p:spPr>
           <a:xfrm>
-            <a:off x="685800" y="2316882"/>
-            <a:ext cx="95250" cy="95250"/>
+            <a:off x="685800" y="2354982"/>
+            <a:ext cx="133350" cy="19050"/>
           </a:xfrm>
-          <a:prstGeom prst="roundRect">
-            <a:avLst>
-              <a:gd name="adj" fmla="val 30000"/>
-            </a:avLst>
+          <a:prstGeom prst="rect">
+            <a:avLst/>
           </a:prstGeom>
           <a:solidFill>
             <a:srgbClr val="0A7C66"/>
@@ -9650,8 +9494,8 @@
         </p:nvSpPr>
         <p:spPr>
           <a:xfrm>
-            <a:off x="990600" y="2167384"/>
-            <a:ext cx="9358503" cy="394320"/>
+            <a:off x="1028700" y="2167384"/>
+            <a:ext cx="9319832" cy="394320"/>
           </a:xfrm>
           <a:prstGeom prst="rect">
             <a:avLst/>
@@ -9692,8 +9536,8 @@
         </p:nvSpPr>
         <p:spPr>
           <a:xfrm>
-            <a:off x="990600" y="2599804"/>
-            <a:ext cx="9358503" cy="238869"/>
+            <a:off x="1028700" y="2599804"/>
+            <a:ext cx="9319832" cy="315441"/>
           </a:xfrm>
           <a:prstGeom prst="rect">
             <a:avLst/>
@@ -9707,12 +9551,12 @@
           <a:p>
             <a:pPr algn="l" indent="0" marL="0">
               <a:lnSpc>
-                <a:spcPts val="1881"/>
+                <a:spcPts val="2484"/>
               </a:lnSpc>
               <a:buNone/>
             </a:pPr>
             <a:r>
-              <a:rPr lang="de-DE" altLang="en-US" sz="1425" dirty="0">
+              <a:rPr lang="de-DE" altLang="en-US" sz="1800" dirty="0">
                 <a:solidFill>
                   <a:srgbClr val="5A6470"/>
                 </a:solidFill>
@@ -9722,7 +9566,7 @@
               </a:rPr>
               <a:t>Leads verfallen weiter, geschätzter Verlust 0,6 Mio € Auftragseingang bis Q2 2027</a:t>
             </a:r>
-            <a:endParaRPr lang="de-DE" sz="1425" dirty="0"/>
+            <a:endParaRPr lang="de-DE" sz="1800" dirty="0"/>
           </a:p>
         </p:txBody>
       </p:sp>
@@ -9734,13 +9578,11 @@
         </p:nvSpPr>
         <p:spPr>
           <a:xfrm>
-            <a:off x="685800" y="3369171"/>
-            <a:ext cx="95250" cy="95250"/>
+            <a:off x="685800" y="3483843"/>
+            <a:ext cx="133350" cy="19050"/>
           </a:xfrm>
-          <a:prstGeom prst="roundRect">
-            <a:avLst>
-              <a:gd name="adj" fmla="val 30000"/>
-            </a:avLst>
+          <a:prstGeom prst="rect">
+            <a:avLst/>
           </a:prstGeom>
           <a:solidFill>
             <a:srgbClr val="0A7C66"/>
@@ -9756,8 +9598,8 @@
         </p:nvSpPr>
         <p:spPr>
           <a:xfrm>
-            <a:off x="990600" y="3219673"/>
-            <a:ext cx="9358503" cy="394320"/>
+            <a:off x="1028700" y="3296245"/>
+            <a:ext cx="9319832" cy="394320"/>
           </a:xfrm>
           <a:prstGeom prst="rect">
             <a:avLst/>
@@ -9798,8 +9640,8 @@
         </p:nvSpPr>
         <p:spPr>
           <a:xfrm>
-            <a:off x="990600" y="3652093"/>
-            <a:ext cx="9358503" cy="238869"/>
+            <a:off x="1028700" y="3728665"/>
+            <a:ext cx="9319832" cy="315441"/>
           </a:xfrm>
           <a:prstGeom prst="rect">
             <a:avLst/>
@@ -9813,12 +9655,12 @@
           <a:p>
             <a:pPr algn="l" indent="0" marL="0">
               <a:lnSpc>
-                <a:spcPts val="1881"/>
+                <a:spcPts val="2484"/>
               </a:lnSpc>
               <a:buNone/>
             </a:pPr>
             <a:r>
-              <a:rPr lang="de-DE" altLang="en-US" sz="1425" dirty="0">
+              <a:rPr lang="de-DE" altLang="en-US" sz="1800" dirty="0">
                 <a:solidFill>
                   <a:srgbClr val="5A6470"/>
                 </a:solidFill>
@@ -9828,7 +9670,7 @@
               </a:rPr>
               <a:t>Kosten 190.000 € p. a., erwarteter Zusatzumsatz 1,1 Mio € im ersten Jahr</a:t>
             </a:r>
-            <a:endParaRPr lang="de-DE" sz="1425" dirty="0"/>
+            <a:endParaRPr lang="de-DE" sz="1800" dirty="0"/>
           </a:p>
         </p:txBody>
       </p:sp>
@@ -9840,13 +9682,11 @@
         </p:nvSpPr>
         <p:spPr>
           <a:xfrm>
-            <a:off x="685800" y="4421460"/>
-            <a:ext cx="95250" cy="95250"/>
+            <a:off x="685800" y="4612704"/>
+            <a:ext cx="133350" cy="19050"/>
           </a:xfrm>
-          <a:prstGeom prst="roundRect">
-            <a:avLst>
-              <a:gd name="adj" fmla="val 30000"/>
-            </a:avLst>
+          <a:prstGeom prst="rect">
+            <a:avLst/>
           </a:prstGeom>
           <a:solidFill>
             <a:srgbClr val="0A7C66"/>
@@ -9862,8 +9702,8 @@
         </p:nvSpPr>
         <p:spPr>
           <a:xfrm>
-            <a:off x="990600" y="4271963"/>
-            <a:ext cx="9358503" cy="394320"/>
+            <a:off x="1028700" y="4425107"/>
+            <a:ext cx="9319832" cy="394320"/>
           </a:xfrm>
           <a:prstGeom prst="rect">
             <a:avLst/>
@@ -9904,8 +9744,8 @@
         </p:nvSpPr>
         <p:spPr>
           <a:xfrm>
-            <a:off x="990600" y="4704383"/>
-            <a:ext cx="9358503" cy="238869"/>
+            <a:off x="1028700" y="4857527"/>
+            <a:ext cx="9319832" cy="315441"/>
           </a:xfrm>
           <a:prstGeom prst="rect">
             <a:avLst/>
@@ -9919,12 +9759,12 @@
           <a:p>
             <a:pPr algn="l" indent="0" marL="0">
               <a:lnSpc>
-                <a:spcPts val="1881"/>
+                <a:spcPts val="2484"/>
               </a:lnSpc>
               <a:buNone/>
             </a:pPr>
             <a:r>
-              <a:rPr lang="de-DE" altLang="en-US" sz="1425" dirty="0">
+              <a:rPr lang="de-DE" altLang="en-US" sz="1800" dirty="0">
                 <a:solidFill>
                   <a:srgbClr val="5A6470"/>
                 </a:solidFill>
@@ -9934,20 +9774,20 @@
               </a:rPr>
               <a:t>Marge sinkt um 8 Punkte, Aufbau dauert bis Q2 2027</a:t>
             </a:r>
-            <a:endParaRPr lang="de-DE" sz="1425" dirty="0"/>
+            <a:endParaRPr lang="de-DE" sz="1800" dirty="0"/>
           </a:p>
         </p:txBody>
       </p:sp>
       <p:sp>
         <p:nvSpPr>
-          <p:cNvPr id="13" name="!!dw:_footer.title"/>
+          <p:cNvPr id="13" name="!!dw:_footer.page"/>
           <p:cNvSpPr/>
           <p:nvPr/>
         </p:nvSpPr>
         <p:spPr>
           <a:xfrm>
-            <a:off x="685800" y="6450360"/>
-            <a:ext cx="1152139" cy="148530"/>
+            <a:off x="11239351" y="6450360"/>
+            <a:ext cx="270852" cy="148530"/>
           </a:xfrm>
           <a:prstGeom prst="rect">
             <a:avLst/>
@@ -9974,49 +9814,7 @@
                 <a:ea typeface="IBM Plex Sans" pitchFamily="34" charset="-122"/>
                 <a:cs typeface="IBM Plex Sans" pitchFamily="34" charset="-120"/>
               </a:rPr>
-              <a:t>Q3-Update Vertrieb</a:t>
-            </a:r>
-            <a:endParaRPr lang="de-DE" sz="975" dirty="0"/>
-          </a:p>
-        </p:txBody>
-      </p:sp>
-      <p:sp>
-        <p:nvSpPr>
-          <p:cNvPr id="14" name="!!dw:_footer.page"/>
-          <p:cNvSpPr/>
-          <p:nvPr/>
-        </p:nvSpPr>
-        <p:spPr>
-          <a:xfrm>
-            <a:off x="11429405" y="6450360"/>
-            <a:ext cx="77947" cy="148530"/>
-          </a:xfrm>
-          <a:prstGeom prst="rect">
-            <a:avLst/>
-          </a:prstGeom>
-          <a:noFill/>
-          <a:ln/>
-        </p:spPr>
-        <p:txBody>
-          <a:bodyPr wrap="square" lIns="0" tIns="0" rIns="0" bIns="0" rtlCol="0" anchor="t"/>
-          <a:lstStyle/>
-          <a:p>
-            <a:pPr algn="l" indent="0" marL="0">
-              <a:lnSpc>
-                <a:spcPts val="1170"/>
-              </a:lnSpc>
-              <a:buNone/>
-            </a:pPr>
-            <a:r>
-              <a:rPr lang="de-DE" altLang="en-US" sz="975" spc="20" kern="0" dirty="0">
-                <a:solidFill>
-                  <a:srgbClr val="5A6470"/>
-                </a:solidFill>
-                <a:latin typeface="IBM Plex Sans" pitchFamily="34" charset="0"/>
-                <a:ea typeface="IBM Plex Sans" pitchFamily="34" charset="-122"/>
-                <a:cs typeface="IBM Plex Sans" pitchFamily="34" charset="-120"/>
-              </a:rPr>
-              <a:t>6</a:t>
+              <a:t>6 / 8</a:t>
             </a:r>
             <a:endParaRPr lang="de-DE" sz="975" dirty="0"/>
           </a:p>
@@ -11029,23 +10827,16 @@
         </p:nvSpPr>
         <p:spPr>
           <a:xfrm>
-            <a:off x="685800" y="2167384"/>
-            <a:ext cx="152400" cy="152400"/>
+            <a:off x="685800" y="2224534"/>
+            <a:ext cx="228600" cy="38100"/>
           </a:xfrm>
-          <a:prstGeom prst="ellipse">
-            <a:avLst>
-              <a:gd name="adj" fmla="val 50000"/>
-            </a:avLst>
+          <a:prstGeom prst="rect">
+            <a:avLst/>
           </a:prstGeom>
           <a:solidFill>
             <a:srgbClr val="0A7C66"/>
           </a:solidFill>
-          <a:ln w="28575">
-            <a:solidFill>
-              <a:srgbClr val="FFFFFF"/>
-            </a:solidFill>
-            <a:prstDash val="solid"/>
-          </a:ln>
+          <a:ln/>
         </p:spPr>
       </p:sp>
       <p:sp>
@@ -11057,7 +10848,7 @@
         <p:spPr>
           <a:xfrm>
             <a:off x="685800" y="2529334"/>
-            <a:ext cx="2505075" cy="1754014"/>
+            <a:ext cx="2505075" cy="1923752"/>
           </a:xfrm>
           <a:prstGeom prst="rect">
             <a:avLst/>
@@ -11074,7 +10865,7 @@
         <p:spPr>
           <a:xfrm>
             <a:off x="685800" y="2529334"/>
-            <a:ext cx="2426637" cy="238869"/>
+            <a:ext cx="2426637" cy="408608"/>
           </a:xfrm>
           <a:prstGeom prst="rect">
             <a:avLst/>
@@ -11088,12 +10879,12 @@
           <a:p>
             <a:pPr algn="l" indent="0" marL="0">
               <a:lnSpc>
-                <a:spcPts val="1881"/>
+                <a:spcPts val="3217"/>
               </a:lnSpc>
               <a:buNone/>
             </a:pPr>
             <a:r>
-              <a:rPr lang="de-DE" altLang="en-US" sz="1425" b="1" dirty="0">
+              <a:rPr lang="de-DE" altLang="en-US" sz="2925" b="1" spc="-22" kern="0" dirty="0">
                 <a:solidFill>
                   <a:srgbClr val="0A7C66"/>
                 </a:solidFill>
@@ -11103,7 +10894,7 @@
               </a:rPr>
               <a:t>3. Okt</a:t>
             </a:r>
-            <a:endParaRPr lang="de-DE" sz="1425" dirty="0"/>
+            <a:endParaRPr lang="de-DE" sz="2925" dirty="0"/>
           </a:p>
         </p:txBody>
       </p:sp>
@@ -11115,7 +10906,7 @@
         </p:nvSpPr>
         <p:spPr>
           <a:xfrm>
-            <a:off x="685800" y="2882503"/>
+            <a:off x="685800" y="3052242"/>
             <a:ext cx="2426637" cy="302121"/>
           </a:xfrm>
           <a:prstGeom prst="rect">
@@ -11157,7 +10948,7 @@
         </p:nvSpPr>
         <p:spPr>
           <a:xfrm>
-            <a:off x="685800" y="3298924"/>
+            <a:off x="685800" y="3468663"/>
             <a:ext cx="2426637" cy="630882"/>
           </a:xfrm>
           <a:prstGeom prst="rect">
@@ -11199,23 +10990,16 @@
         </p:nvSpPr>
         <p:spPr>
           <a:xfrm>
-            <a:off x="3457575" y="2167384"/>
-            <a:ext cx="152400" cy="152400"/>
+            <a:off x="3457575" y="2224534"/>
+            <a:ext cx="228600" cy="38100"/>
           </a:xfrm>
-          <a:prstGeom prst="ellipse">
-            <a:avLst>
-              <a:gd name="adj" fmla="val 50000"/>
-            </a:avLst>
+          <a:prstGeom prst="rect">
+            <a:avLst/>
           </a:prstGeom>
           <a:solidFill>
             <a:srgbClr val="0A7C66"/>
           </a:solidFill>
-          <a:ln w="28575">
-            <a:solidFill>
-              <a:srgbClr val="FFFFFF"/>
-            </a:solidFill>
-            <a:prstDash val="solid"/>
-          </a:ln>
+          <a:ln/>
         </p:spPr>
       </p:sp>
       <p:sp>
@@ -11227,7 +11011,7 @@
         <p:spPr>
           <a:xfrm>
             <a:off x="3457575" y="2529334"/>
-            <a:ext cx="2505075" cy="1754014"/>
+            <a:ext cx="2505075" cy="1923752"/>
           </a:xfrm>
           <a:prstGeom prst="rect">
             <a:avLst/>
@@ -11244,7 +11028,7 @@
         <p:spPr>
           <a:xfrm>
             <a:off x="3457575" y="2529334"/>
-            <a:ext cx="2426637" cy="238869"/>
+            <a:ext cx="2426637" cy="408608"/>
           </a:xfrm>
           <a:prstGeom prst="rect">
             <a:avLst/>
@@ -11258,12 +11042,12 @@
           <a:p>
             <a:pPr algn="l" indent="0" marL="0">
               <a:lnSpc>
-                <a:spcPts val="1881"/>
+                <a:spcPts val="3217"/>
               </a:lnSpc>
               <a:buNone/>
             </a:pPr>
             <a:r>
-              <a:rPr lang="de-DE" altLang="en-US" sz="1425" b="1" dirty="0">
+              <a:rPr lang="de-DE" altLang="en-US" sz="2925" b="1" spc="-22" kern="0" dirty="0">
                 <a:solidFill>
                   <a:srgbClr val="0A7C66"/>
                 </a:solidFill>
@@ -11273,7 +11057,7 @@
               </a:rPr>
               <a:t>Okt</a:t>
             </a:r>
-            <a:endParaRPr lang="de-DE" sz="1425" dirty="0"/>
+            <a:endParaRPr lang="de-DE" sz="2925" dirty="0"/>
           </a:p>
         </p:txBody>
       </p:sp>
@@ -11285,7 +11069,7 @@
         </p:nvSpPr>
         <p:spPr>
           <a:xfrm>
-            <a:off x="3457575" y="2882503"/>
+            <a:off x="3457575" y="3052242"/>
             <a:ext cx="2426637" cy="302121"/>
           </a:xfrm>
           <a:prstGeom prst="rect">
@@ -11327,7 +11111,7 @@
         </p:nvSpPr>
         <p:spPr>
           <a:xfrm>
-            <a:off x="3457575" y="3298924"/>
+            <a:off x="3457575" y="3468663"/>
             <a:ext cx="2426637" cy="946324"/>
           </a:xfrm>
           <a:prstGeom prst="rect">
@@ -11369,23 +11153,16 @@
         </p:nvSpPr>
         <p:spPr>
           <a:xfrm>
-            <a:off x="6229350" y="2167384"/>
-            <a:ext cx="152400" cy="152400"/>
+            <a:off x="6229350" y="2224534"/>
+            <a:ext cx="228600" cy="38100"/>
           </a:xfrm>
-          <a:prstGeom prst="ellipse">
-            <a:avLst>
-              <a:gd name="adj" fmla="val 50000"/>
-            </a:avLst>
+          <a:prstGeom prst="rect">
+            <a:avLst/>
           </a:prstGeom>
           <a:solidFill>
             <a:srgbClr val="0A7C66"/>
           </a:solidFill>
-          <a:ln w="28575">
-            <a:solidFill>
-              <a:srgbClr val="FFFFFF"/>
-            </a:solidFill>
-            <a:prstDash val="solid"/>
-          </a:ln>
+          <a:ln/>
         </p:spPr>
       </p:sp>
       <p:sp>
@@ -11397,7 +11174,7 @@
         <p:spPr>
           <a:xfrm>
             <a:off x="6229350" y="2529334"/>
-            <a:ext cx="2505075" cy="1754014"/>
+            <a:ext cx="2505075" cy="1923752"/>
           </a:xfrm>
           <a:prstGeom prst="rect">
             <a:avLst/>
@@ -11414,7 +11191,7 @@
         <p:spPr>
           <a:xfrm>
             <a:off x="6229350" y="2529334"/>
-            <a:ext cx="2426637" cy="238869"/>
+            <a:ext cx="2426637" cy="408608"/>
           </a:xfrm>
           <a:prstGeom prst="rect">
             <a:avLst/>
@@ -11428,12 +11205,12 @@
           <a:p>
             <a:pPr algn="l" indent="0" marL="0">
               <a:lnSpc>
-                <a:spcPts val="1881"/>
+                <a:spcPts val="3217"/>
               </a:lnSpc>
               <a:buNone/>
             </a:pPr>
             <a:r>
-              <a:rPr lang="de-DE" altLang="en-US" sz="1425" b="1" dirty="0">
+              <a:rPr lang="de-DE" altLang="en-US" sz="2925" b="1" spc="-22" kern="0" dirty="0">
                 <a:solidFill>
                   <a:srgbClr val="0A7C66"/>
                 </a:solidFill>
@@ -11443,7 +11220,7 @@
               </a:rPr>
               <a:t>Nov</a:t>
             </a:r>
-            <a:endParaRPr lang="de-DE" sz="1425" dirty="0"/>
+            <a:endParaRPr lang="de-DE" sz="2925" dirty="0"/>
           </a:p>
         </p:txBody>
       </p:sp>
@@ -11455,7 +11232,7 @@
         </p:nvSpPr>
         <p:spPr>
           <a:xfrm>
-            <a:off x="6229350" y="2882503"/>
+            <a:off x="6229350" y="3052242"/>
             <a:ext cx="2426637" cy="302121"/>
           </a:xfrm>
           <a:prstGeom prst="rect">
@@ -11497,7 +11274,7 @@
         </p:nvSpPr>
         <p:spPr>
           <a:xfrm>
-            <a:off x="6229350" y="3298924"/>
+            <a:off x="6229350" y="3468663"/>
             <a:ext cx="2426637" cy="946324"/>
           </a:xfrm>
           <a:prstGeom prst="rect">
@@ -11539,23 +11316,16 @@
         </p:nvSpPr>
         <p:spPr>
           <a:xfrm>
-            <a:off x="9001125" y="2167384"/>
-            <a:ext cx="152400" cy="152400"/>
+            <a:off x="9001125" y="2224534"/>
+            <a:ext cx="228600" cy="38100"/>
           </a:xfrm>
-          <a:prstGeom prst="ellipse">
-            <a:avLst>
-              <a:gd name="adj" fmla="val 50000"/>
-            </a:avLst>
+          <a:prstGeom prst="rect">
+            <a:avLst/>
           </a:prstGeom>
           <a:solidFill>
             <a:srgbClr val="0A7C66"/>
           </a:solidFill>
-          <a:ln w="28575">
-            <a:solidFill>
-              <a:srgbClr val="FFFFFF"/>
-            </a:solidFill>
-            <a:prstDash val="solid"/>
-          </a:ln>
+          <a:ln/>
         </p:spPr>
       </p:sp>
       <p:sp>
@@ -11567,7 +11337,7 @@
         <p:spPr>
           <a:xfrm>
             <a:off x="9001125" y="2529334"/>
-            <a:ext cx="2505075" cy="1754014"/>
+            <a:ext cx="2505075" cy="1923752"/>
           </a:xfrm>
           <a:prstGeom prst="rect">
             <a:avLst/>
@@ -11584,7 +11354,7 @@
         <p:spPr>
           <a:xfrm>
             <a:off x="9001125" y="2529334"/>
-            <a:ext cx="2426637" cy="238869"/>
+            <a:ext cx="2426637" cy="408608"/>
           </a:xfrm>
           <a:prstGeom prst="rect">
             <a:avLst/>
@@ -11598,12 +11368,12 @@
           <a:p>
             <a:pPr algn="l" indent="0" marL="0">
               <a:lnSpc>
-                <a:spcPts val="1881"/>
+                <a:spcPts val="3217"/>
               </a:lnSpc>
               <a:buNone/>
             </a:pPr>
             <a:r>
-              <a:rPr lang="de-DE" altLang="en-US" sz="1425" b="1" dirty="0">
+              <a:rPr lang="de-DE" altLang="en-US" sz="2925" b="1" spc="-22" kern="0" dirty="0">
                 <a:solidFill>
                   <a:srgbClr val="0A7C66"/>
                 </a:solidFill>
@@ -11613,7 +11383,7 @@
               </a:rPr>
               <a:t>Jan 2027</a:t>
             </a:r>
-            <a:endParaRPr lang="de-DE" sz="1425" dirty="0"/>
+            <a:endParaRPr lang="de-DE" sz="2925" dirty="0"/>
           </a:p>
         </p:txBody>
       </p:sp>
@@ -11625,7 +11395,7 @@
         </p:nvSpPr>
         <p:spPr>
           <a:xfrm>
-            <a:off x="9001125" y="2882503"/>
+            <a:off x="9001125" y="3052242"/>
             <a:ext cx="2426637" cy="302121"/>
           </a:xfrm>
           <a:prstGeom prst="rect">
@@ -11667,7 +11437,7 @@
         </p:nvSpPr>
         <p:spPr>
           <a:xfrm>
-            <a:off x="9001125" y="3298924"/>
+            <a:off x="9001125" y="3468663"/>
             <a:ext cx="2426637" cy="946324"/>
           </a:xfrm>
           <a:prstGeom prst="rect">
@@ -11703,14 +11473,14 @@
       </p:sp>
       <p:sp>
         <p:nvSpPr>
-          <p:cNvPr id="25" name="!!dw:_footer.title"/>
+          <p:cNvPr id="25" name="!!dw:_footer.page"/>
           <p:cNvSpPr/>
           <p:nvPr/>
         </p:nvSpPr>
         <p:spPr>
           <a:xfrm>
-            <a:off x="685800" y="6450360"/>
-            <a:ext cx="1152139" cy="148530"/>
+            <a:off x="11239351" y="6450360"/>
+            <a:ext cx="270852" cy="148530"/>
           </a:xfrm>
           <a:prstGeom prst="rect">
             <a:avLst/>
@@ -11737,49 +11507,7 @@
                 <a:ea typeface="IBM Plex Sans" pitchFamily="34" charset="-122"/>
                 <a:cs typeface="IBM Plex Sans" pitchFamily="34" charset="-120"/>
               </a:rPr>
-              <a:t>Q3-Update Vertrieb</a:t>
-            </a:r>
-            <a:endParaRPr lang="de-DE" sz="975" dirty="0"/>
-          </a:p>
-        </p:txBody>
-      </p:sp>
-      <p:sp>
-        <p:nvSpPr>
-          <p:cNvPr id="26" name="!!dw:_footer.page"/>
-          <p:cNvSpPr/>
-          <p:nvPr/>
-        </p:nvSpPr>
-        <p:spPr>
-          <a:xfrm>
-            <a:off x="11429405" y="6450360"/>
-            <a:ext cx="77947" cy="148530"/>
-          </a:xfrm>
-          <a:prstGeom prst="rect">
-            <a:avLst/>
-          </a:prstGeom>
-          <a:noFill/>
-          <a:ln/>
-        </p:spPr>
-        <p:txBody>
-          <a:bodyPr wrap="square" lIns="0" tIns="0" rIns="0" bIns="0" rtlCol="0" anchor="t"/>
-          <a:lstStyle/>
-          <a:p>
-            <a:pPr algn="l" indent="0" marL="0">
-              <a:lnSpc>
-                <a:spcPts val="1170"/>
-              </a:lnSpc>
-              <a:buNone/>
-            </a:pPr>
-            <a:r>
-              <a:rPr lang="de-DE" altLang="en-US" sz="975" spc="20" kern="0" dirty="0">
-                <a:solidFill>
-                  <a:srgbClr val="5A6470"/>
-                </a:solidFill>
-                <a:latin typeface="IBM Plex Sans" pitchFamily="34" charset="0"/>
-                <a:ea typeface="IBM Plex Sans" pitchFamily="34" charset="-122"/>
-                <a:cs typeface="IBM Plex Sans" pitchFamily="34" charset="-120"/>
-              </a:rPr>
-              <a:t>7</a:t>
+              <a:t>7 / 8</a:t>
             </a:r>
             <a:endParaRPr lang="de-DE" sz="975" dirty="0"/>
           </a:p>
